--- a/generated/Tier 1 Broker Scorecards/Usg Insurance Services Inc_Broker_Scorecard.pptx
+++ b/generated/Tier 1 Broker Scorecards/Usg Insurance Services Inc_Broker_Scorecard.pptx
@@ -3394,7 +3394,7 @@
                         <a:rPr sz="900">
                           <a:latin typeface="Segoe UI"/>
                         </a:rPr>
-                        <a:t>Tier 1  |  8.99% / 15.00%</a:t>
+                        <a:t>Tier 1  |  7.85% / 15.00%</a:t>
                       </a:r>
                     </a:p>
                   </a:txBody>
@@ -3690,7 +3690,7 @@
                         <a:rPr sz="900">
                           <a:latin typeface="Segoe UI"/>
                         </a:rPr>
-                        <a:t>Fleet Bound Premium: $183,371.57</a:t>
+                        <a:t>Fleet Bound Premium: $192,590.56</a:t>
                       </a:r>
                     </a:p>
                   </a:txBody>
@@ -3727,7 +3727,7 @@
                         <a:rPr sz="900">
                           <a:latin typeface="Segoe UI"/>
                         </a:rPr>
-                        <a:t>Fleet Book %: 52.9%</a:t>
+                        <a:t>Fleet Book %: 55.6%</a:t>
                       </a:r>
                     </a:p>
                   </a:txBody>
@@ -3766,7 +3766,7 @@
                         <a:rPr sz="900">
                           <a:latin typeface="Segoe UI"/>
                         </a:rPr>
-                        <a:t>Non-Fleet Subs: 162  |  Binds: 14</a:t>
+                        <a:t>Non-Fleet Subs: 164  |  Binds: 12</a:t>
                       </a:r>
                     </a:p>
                   </a:txBody>
@@ -3803,7 +3803,7 @@
                         <a:rPr sz="900">
                           <a:latin typeface="Segoe UI"/>
                         </a:rPr>
-                        <a:t>Non-Fleet Bound Premium: $163,309.04</a:t>
+                        <a:t>Non-Fleet Bound Premium: $154,090.05</a:t>
                       </a:r>
                     </a:p>
                   </a:txBody>
@@ -3840,7 +3840,7 @@
                         <a:rPr sz="900">
                           <a:latin typeface="Segoe UI"/>
                         </a:rPr>
-                        <a:t>Non-Fleet Book %: 47.1%</a:t>
+                        <a:t>Non-Fleet Book %: 44.4%</a:t>
                       </a:r>
                     </a:p>
                   </a:txBody>
@@ -4428,7 +4428,7 @@
                           </a:solidFill>
                           <a:latin typeface="Segoe UI"/>
                         </a:rPr>
-                        <a:t>28</a:t>
+                        <a:t>32</a:t>
                       </a:r>
                     </a:p>
                   </a:txBody>
@@ -4707,7 +4707,7 @@
                           </a:solidFill>
                           <a:latin typeface="Segoe UI"/>
                         </a:rPr>
-                        <a:t>7.1%</a:t>
+                        <a:t>6.2%</a:t>
                       </a:r>
                     </a:p>
                   </a:txBody>

--- a/generated/Tier 1 Broker Scorecards/Usg Insurance Services Inc_Broker_Scorecard.pptx
+++ b/generated/Tier 1 Broker Scorecards/Usg Insurance Services Inc_Broker_Scorecard.pptx
@@ -3394,7 +3394,7 @@
                         <a:rPr sz="900">
                           <a:latin typeface="Segoe UI"/>
                         </a:rPr>
-                        <a:t>Tier 1  |  7.85% / 15.00%</a:t>
+                        <a:t>Tier 1  |  8.33% / 15.00%</a:t>
                       </a:r>
                     </a:p>
                   </a:txBody>
@@ -3690,7 +3690,7 @@
                         <a:rPr sz="900">
                           <a:latin typeface="Segoe UI"/>
                         </a:rPr>
-                        <a:t>Fleet Bound Premium: $192,590.56</a:t>
+                        <a:t>Fleet Bound Premium: $185,027.77</a:t>
                       </a:r>
                     </a:p>
                   </a:txBody>
@@ -3727,7 +3727,7 @@
                         <a:rPr sz="900">
                           <a:latin typeface="Segoe UI"/>
                         </a:rPr>
-                        <a:t>Fleet Book %: 55.6%</a:t>
+                        <a:t>Fleet Book %: 53.4%</a:t>
                       </a:r>
                     </a:p>
                   </a:txBody>
@@ -3766,7 +3766,7 @@
                         <a:rPr sz="900">
                           <a:latin typeface="Segoe UI"/>
                         </a:rPr>
-                        <a:t>Non-Fleet Subs: 164  |  Binds: 12</a:t>
+                        <a:t>Non-Fleet Subs: 165  |  Binds: 13</a:t>
                       </a:r>
                     </a:p>
                   </a:txBody>
@@ -3803,7 +3803,7 @@
                         <a:rPr sz="900">
                           <a:latin typeface="Segoe UI"/>
                         </a:rPr>
-                        <a:t>Non-Fleet Bound Premium: $154,090.05</a:t>
+                        <a:t>Non-Fleet Bound Premium: $161,652.84</a:t>
                       </a:r>
                     </a:p>
                   </a:txBody>
@@ -3840,7 +3840,7 @@
                         <a:rPr sz="900">
                           <a:latin typeface="Segoe UI"/>
                         </a:rPr>
-                        <a:t>Non-Fleet Book %: 44.4%</a:t>
+                        <a:t>Non-Fleet Book %: 46.6%</a:t>
                       </a:r>
                     </a:p>
                   </a:txBody>
@@ -4428,7 +4428,7 @@
                           </a:solidFill>
                           <a:latin typeface="Segoe UI"/>
                         </a:rPr>
-                        <a:t>32</a:t>
+                        <a:t>33</a:t>
                       </a:r>
                     </a:p>
                   </a:txBody>
@@ -4581,7 +4581,7 @@
                         <a:rPr sz="800">
                           <a:latin typeface="Segoe UI"/>
                         </a:rPr>
-                        <a:t>12.9%</a:t>
+                        <a:t>14.5%</a:t>
                       </a:r>
                     </a:p>
                   </a:txBody>
@@ -4707,7 +4707,7 @@
                           </a:solidFill>
                           <a:latin typeface="Segoe UI"/>
                         </a:rPr>
-                        <a:t>6.2%</a:t>
+                        <a:t>9.1%</a:t>
                       </a:r>
                     </a:p>
                   </a:txBody>
@@ -4866,7 +4866,7 @@
                         <a:rPr sz="800">
                           <a:latin typeface="Segoe UI"/>
                         </a:rPr>
-                        <a:t>8</a:t>
+                        <a:t>9</a:t>
                       </a:r>
                     </a:p>
                   </a:txBody>
@@ -4983,7 +4983,7 @@
                           </a:solidFill>
                           <a:latin typeface="Segoe UI"/>
                         </a:rPr>
-                        <a:t>2</a:t>
+                        <a:t>3</a:t>
                       </a:r>
                     </a:p>
                   </a:txBody>

--- a/generated/Tier 1 Broker Scorecards/Usg Insurance Services Inc_Broker_Scorecard.pptx
+++ b/generated/Tier 1 Broker Scorecards/Usg Insurance Services Inc_Broker_Scorecard.pptx
@@ -3357,7 +3357,7 @@
                         <a:rPr sz="800">
                           <a:latin typeface="Segoe UI"/>
                         </a:rPr>
-                        <a:t>$1,155,193.59 / $1,056,486.23 / $346,680.61</a:t>
+                        <a:t>$1,155,193.59 / $1,088,475.87 / $378,670.25</a:t>
                       </a:r>
                     </a:p>
                   </a:txBody>
@@ -3394,7 +3394,7 @@
                         <a:rPr sz="900">
                           <a:latin typeface="Segoe UI"/>
                         </a:rPr>
-                        <a:t>Tier 1  |  8.33% / 15.00%</a:t>
+                        <a:t>Tier 1  |  8.76% / 15.00%</a:t>
                       </a:r>
                     </a:p>
                   </a:txBody>
@@ -3431,7 +3431,7 @@
                         <a:rPr sz="900">
                           <a:latin typeface="Segoe UI"/>
                         </a:rPr>
-                        <a:t>$1,617,271.03  (21.4% achieved)</a:t>
+                        <a:t>$1,617,271.03  (23.4% achieved)</a:t>
                       </a:r>
                     </a:p>
                   </a:txBody>
@@ -3690,7 +3690,7 @@
                         <a:rPr sz="900">
                           <a:latin typeface="Segoe UI"/>
                         </a:rPr>
-                        <a:t>Fleet Bound Premium: $185,027.77</a:t>
+                        <a:t>Fleet Bound Premium: $192,615.97</a:t>
                       </a:r>
                     </a:p>
                   </a:txBody>
@@ -3727,7 +3727,7 @@
                         <a:rPr sz="900">
                           <a:latin typeface="Segoe UI"/>
                         </a:rPr>
-                        <a:t>Fleet Book %: 53.4%</a:t>
+                        <a:t>Fleet Book %: 50.9%</a:t>
                       </a:r>
                     </a:p>
                   </a:txBody>
@@ -3766,7 +3766,7 @@
                         <a:rPr sz="900">
                           <a:latin typeface="Segoe UI"/>
                         </a:rPr>
-                        <a:t>Non-Fleet Subs: 165  |  Binds: 13</a:t>
+                        <a:t>Non-Fleet Subs: 167  |  Binds: 14</a:t>
                       </a:r>
                     </a:p>
                   </a:txBody>
@@ -3803,7 +3803,7 @@
                         <a:rPr sz="900">
                           <a:latin typeface="Segoe UI"/>
                         </a:rPr>
-                        <a:t>Non-Fleet Bound Premium: $161,652.84</a:t>
+                        <a:t>Non-Fleet Bound Premium: $186,054.28</a:t>
                       </a:r>
                     </a:p>
                   </a:txBody>
@@ -3840,7 +3840,7 @@
                         <a:rPr sz="900">
                           <a:latin typeface="Segoe UI"/>
                         </a:rPr>
-                        <a:t>Non-Fleet Book %: 46.6%</a:t>
+                        <a:t>Non-Fleet Book %: 49.1%</a:t>
                       </a:r>
                     </a:p>
                   </a:txBody>
@@ -4428,7 +4428,7 @@
                           </a:solidFill>
                           <a:latin typeface="Segoe UI"/>
                         </a:rPr>
-                        <a:t>33</a:t>
+                        <a:t>36</a:t>
                       </a:r>
                     </a:p>
                   </a:txBody>
@@ -4707,7 +4707,7 @@
                           </a:solidFill>
                           <a:latin typeface="Segoe UI"/>
                         </a:rPr>
-                        <a:t>9.1%</a:t>
+                        <a:t>8.3%</a:t>
                       </a:r>
                     </a:p>
                   </a:txBody>
@@ -5256,10 +5256,13 @@
                     <a:p>
                       <a:pPr algn="ctr"/>
                       <a:r>
-                        <a:rPr sz="800">
+                        <a:rPr sz="800" b="1">
+                          <a:solidFill>
+                            <a:srgbClr val="DC2626"/>
+                          </a:solidFill>
                           <a:latin typeface="Segoe UI"/>
                         </a:rPr>
-                        <a:t/>
+                        <a:t>$32.0K</a:t>
                       </a:r>
                     </a:p>
                   </a:txBody>

--- a/generated/Tier 1 Broker Scorecards/Usg Insurance Services Inc_Broker_Scorecard.pptx
+++ b/generated/Tier 1 Broker Scorecards/Usg Insurance Services Inc_Broker_Scorecard.pptx
@@ -3357,7 +3357,7 @@
                         <a:rPr sz="800">
                           <a:latin typeface="Segoe UI"/>
                         </a:rPr>
-                        <a:t>$1,155,193.59 / $1,088,475.87 / $378,670.25</a:t>
+                        <a:t>$1,155,193.59 / $1,109,210.15 / $399,404.53</a:t>
                       </a:r>
                     </a:p>
                   </a:txBody>
@@ -3394,7 +3394,7 @@
                         <a:rPr sz="900">
                           <a:latin typeface="Segoe UI"/>
                         </a:rPr>
-                        <a:t>Tier 1  |  8.76% / 15.00%</a:t>
+                        <a:t>Tier 1  |  9.74% / 15.00%</a:t>
                       </a:r>
                     </a:p>
                   </a:txBody>
@@ -3431,7 +3431,7 @@
                         <a:rPr sz="900">
                           <a:latin typeface="Segoe UI"/>
                         </a:rPr>
-                        <a:t>$1,617,271.03  (23.4% achieved)</a:t>
+                        <a:t>$1,617,271.03  (24.7% achieved)</a:t>
                       </a:r>
                     </a:p>
                   </a:txBody>
@@ -3653,7 +3653,7 @@
                         <a:rPr sz="900">
                           <a:latin typeface="Segoe UI"/>
                         </a:rPr>
-                        <a:t>Fleet Subs: 27  |  Binds: 3</a:t>
+                        <a:t>Fleet Subs: 28  |  Binds: 4</a:t>
                       </a:r>
                     </a:p>
                   </a:txBody>
@@ -3690,7 +3690,7 @@
                         <a:rPr sz="900">
                           <a:latin typeface="Segoe UI"/>
                         </a:rPr>
-                        <a:t>Fleet Bound Premium: $192,615.97</a:t>
+                        <a:t>Fleet Bound Premium: $199,251.90</a:t>
                       </a:r>
                     </a:p>
                   </a:txBody>
@@ -3727,7 +3727,7 @@
                         <a:rPr sz="900">
                           <a:latin typeface="Segoe UI"/>
                         </a:rPr>
-                        <a:t>Fleet Book %: 50.9%</a:t>
+                        <a:t>Fleet Book %: 49.9%</a:t>
                       </a:r>
                     </a:p>
                   </a:txBody>
@@ -3766,7 +3766,7 @@
                         <a:rPr sz="900">
                           <a:latin typeface="Segoe UI"/>
                         </a:rPr>
-                        <a:t>Non-Fleet Subs: 167  |  Binds: 14</a:t>
+                        <a:t>Non-Fleet Subs: 167  |  Binds: 15</a:t>
                       </a:r>
                     </a:p>
                   </a:txBody>
@@ -3803,7 +3803,7 @@
                         <a:rPr sz="900">
                           <a:latin typeface="Segoe UI"/>
                         </a:rPr>
-                        <a:t>Non-Fleet Bound Premium: $186,054.28</a:t>
+                        <a:t>Non-Fleet Bound Premium: $200,152.63</a:t>
                       </a:r>
                     </a:p>
                   </a:txBody>
@@ -3840,7 +3840,7 @@
                         <a:rPr sz="900">
                           <a:latin typeface="Segoe UI"/>
                         </a:rPr>
-                        <a:t>Non-Fleet Book %: 49.1%</a:t>
+                        <a:t>Non-Fleet Book %: 50.1%</a:t>
                       </a:r>
                     </a:p>
                   </a:txBody>
@@ -4428,7 +4428,7 @@
                           </a:solidFill>
                           <a:latin typeface="Segoe UI"/>
                         </a:rPr>
-                        <a:t>36</a:t>
+                        <a:t>37</a:t>
                       </a:r>
                     </a:p>
                   </a:txBody>
@@ -4581,7 +4581,7 @@
                         <a:rPr sz="800">
                           <a:latin typeface="Segoe UI"/>
                         </a:rPr>
-                        <a:t>14.5%</a:t>
+                        <a:t>12.9%</a:t>
                       </a:r>
                     </a:p>
                   </a:txBody>
@@ -4707,7 +4707,7 @@
                           </a:solidFill>
                           <a:latin typeface="Segoe UI"/>
                         </a:rPr>
-                        <a:t>8.3%</a:t>
+                        <a:t>13.5%</a:t>
                       </a:r>
                     </a:p>
                   </a:txBody>
@@ -4866,7 +4866,7 @@
                         <a:rPr sz="800">
                           <a:latin typeface="Segoe UI"/>
                         </a:rPr>
-                        <a:t>9</a:t>
+                        <a:t>8</a:t>
                       </a:r>
                     </a:p>
                   </a:txBody>
@@ -4983,7 +4983,7 @@
                           </a:solidFill>
                           <a:latin typeface="Segoe UI"/>
                         </a:rPr>
-                        <a:t>3</a:t>
+                        <a:t>5</a:t>
                       </a:r>
                     </a:p>
                   </a:txBody>
@@ -5262,7 +5262,7 @@
                           </a:solidFill>
                           <a:latin typeface="Segoe UI"/>
                         </a:rPr>
-                        <a:t>$32.0K</a:t>
+                        <a:t>$52.7K</a:t>
                       </a:r>
                     </a:p>
                   </a:txBody>

--- a/generated/Tier 1 Broker Scorecards/Usg Insurance Services Inc_Broker_Scorecard.pptx
+++ b/generated/Tier 1 Broker Scorecards/Usg Insurance Services Inc_Broker_Scorecard.pptx
@@ -3357,7 +3357,7 @@
                         <a:rPr sz="800">
                           <a:latin typeface="Segoe UI"/>
                         </a:rPr>
-                        <a:t>$1,155,193.59 / $1,109,210.15 / $399,404.53</a:t>
+                        <a:t>$1,155,193.59 / $1,129,045.68 / $419,240.06</a:t>
                       </a:r>
                     </a:p>
                   </a:txBody>
@@ -3394,7 +3394,7 @@
                         <a:rPr sz="900">
                           <a:latin typeface="Segoe UI"/>
                         </a:rPr>
-                        <a:t>Tier 1  |  9.74% / 15.00%</a:t>
+                        <a:t>Tier 1  |  10.15% / 15.00%</a:t>
                       </a:r>
                     </a:p>
                   </a:txBody>
@@ -3431,7 +3431,7 @@
                         <a:rPr sz="900">
                           <a:latin typeface="Segoe UI"/>
                         </a:rPr>
-                        <a:t>$1,617,271.03  (24.7% achieved)</a:t>
+                        <a:t>$1,617,271.03  (25.9% achieved)</a:t>
                       </a:r>
                     </a:p>
                   </a:txBody>
@@ -3690,7 +3690,7 @@
                         <a:rPr sz="900">
                           <a:latin typeface="Segoe UI"/>
                         </a:rPr>
-                        <a:t>Fleet Bound Premium: $199,251.90</a:t>
+                        <a:t>Fleet Bound Premium: $203,345.23</a:t>
                       </a:r>
                     </a:p>
                   </a:txBody>
@@ -3727,7 +3727,7 @@
                         <a:rPr sz="900">
                           <a:latin typeface="Segoe UI"/>
                         </a:rPr>
-                        <a:t>Fleet Book %: 49.9%</a:t>
+                        <a:t>Fleet Book %: 48.5%</a:t>
                       </a:r>
                     </a:p>
                   </a:txBody>
@@ -3766,7 +3766,7 @@
                         <a:rPr sz="900">
                           <a:latin typeface="Segoe UI"/>
                         </a:rPr>
-                        <a:t>Non-Fleet Subs: 167  |  Binds: 15</a:t>
+                        <a:t>Non-Fleet Subs: 169  |  Binds: 16</a:t>
                       </a:r>
                     </a:p>
                   </a:txBody>
@@ -3803,7 +3803,7 @@
                         <a:rPr sz="900">
                           <a:latin typeface="Segoe UI"/>
                         </a:rPr>
-                        <a:t>Non-Fleet Bound Premium: $200,152.63</a:t>
+                        <a:t>Non-Fleet Bound Premium: $215,894.83</a:t>
                       </a:r>
                     </a:p>
                   </a:txBody>
@@ -3840,7 +3840,7 @@
                         <a:rPr sz="900">
                           <a:latin typeface="Segoe UI"/>
                         </a:rPr>
-                        <a:t>Non-Fleet Book %: 50.1%</a:t>
+                        <a:t>Non-Fleet Book %: 51.5%</a:t>
                       </a:r>
                     </a:p>
                   </a:txBody>
@@ -4428,7 +4428,7 @@
                           </a:solidFill>
                           <a:latin typeface="Segoe UI"/>
                         </a:rPr>
-                        <a:t>37</a:t>
+                        <a:t>39</a:t>
                       </a:r>
                     </a:p>
                   </a:txBody>
@@ -4581,7 +4581,7 @@
                         <a:rPr sz="800">
                           <a:latin typeface="Segoe UI"/>
                         </a:rPr>
-                        <a:t>12.9%</a:t>
+                        <a:t>14.5%</a:t>
                       </a:r>
                     </a:p>
                   </a:txBody>
@@ -4707,7 +4707,7 @@
                           </a:solidFill>
                           <a:latin typeface="Segoe UI"/>
                         </a:rPr>
-                        <a:t>13.5%</a:t>
+                        <a:t>12.8%</a:t>
                       </a:r>
                     </a:p>
                   </a:txBody>
@@ -4866,7 +4866,7 @@
                         <a:rPr sz="800">
                           <a:latin typeface="Segoe UI"/>
                         </a:rPr>
-                        <a:t>8</a:t>
+                        <a:t>9</a:t>
                       </a:r>
                     </a:p>
                   </a:txBody>
@@ -5262,7 +5262,7 @@
                           </a:solidFill>
                           <a:latin typeface="Segoe UI"/>
                         </a:rPr>
-                        <a:t>$52.7K</a:t>
+                        <a:t>$72.6K</a:t>
                       </a:r>
                     </a:p>
                   </a:txBody>

--- a/generated/Tier 1 Broker Scorecards/Usg Insurance Services Inc_Broker_Scorecard.pptx
+++ b/generated/Tier 1 Broker Scorecards/Usg Insurance Services Inc_Broker_Scorecard.pptx
@@ -4581,7 +4581,7 @@
                         <a:rPr sz="800">
                           <a:latin typeface="Segoe UI"/>
                         </a:rPr>
-                        <a:t>14.5%</a:t>
+                        <a:t>12.9%</a:t>
                       </a:r>
                     </a:p>
                   </a:txBody>
@@ -4866,7 +4866,7 @@
                         <a:rPr sz="800">
                           <a:latin typeface="Segoe UI"/>
                         </a:rPr>
-                        <a:t>9</a:t>
+                        <a:t>8</a:t>
                       </a:r>
                     </a:p>
                   </a:txBody>

--- a/generated/Tier 1 Broker Scorecards/Usg Insurance Services Inc_Broker_Scorecard.pptx
+++ b/generated/Tier 1 Broker Scorecards/Usg Insurance Services Inc_Broker_Scorecard.pptx
@@ -4581,7 +4581,7 @@
                         <a:rPr sz="800">
                           <a:latin typeface="Segoe UI"/>
                         </a:rPr>
-                        <a:t>12.9%</a:t>
+                        <a:t>14.5%</a:t>
                       </a:r>
                     </a:p>
                   </a:txBody>
@@ -4866,7 +4866,7 @@
                         <a:rPr sz="800">
                           <a:latin typeface="Segoe UI"/>
                         </a:rPr>
-                        <a:t>8</a:t>
+                        <a:t>9</a:t>
                       </a:r>
                     </a:p>
                   </a:txBody>

--- a/generated/Tier 1 Broker Scorecards/Usg Insurance Services Inc_Broker_Scorecard.pptx
+++ b/generated/Tier 1 Broker Scorecards/Usg Insurance Services Inc_Broker_Scorecard.pptx
@@ -3357,7 +3357,7 @@
                         <a:rPr sz="800">
                           <a:latin typeface="Segoe UI"/>
                         </a:rPr>
-                        <a:t>$1,155,193.59 / $1,129,045.68 / $419,240.06</a:t>
+                        <a:t>$1,155,193.59 / $1,162,926.98 / $453,121.36</a:t>
                       </a:r>
                     </a:p>
                   </a:txBody>
@@ -3394,7 +3394,7 @@
                         <a:rPr sz="900">
                           <a:latin typeface="Segoe UI"/>
                         </a:rPr>
-                        <a:t>Tier 1  |  10.15% / 15.00%</a:t>
+                        <a:t>Tier 1  |  10.66% / 15.00%</a:t>
                       </a:r>
                     </a:p>
                   </a:txBody>
@@ -3431,7 +3431,7 @@
                         <a:rPr sz="900">
                           <a:latin typeface="Segoe UI"/>
                         </a:rPr>
-                        <a:t>$1,617,271.03  (25.9% achieved)</a:t>
+                        <a:t>$1,617,271.03  (28.0% achieved)</a:t>
                       </a:r>
                     </a:p>
                   </a:txBody>
@@ -3690,7 +3690,7 @@
                         <a:rPr sz="900">
                           <a:latin typeface="Segoe UI"/>
                         </a:rPr>
-                        <a:t>Fleet Bound Premium: $203,345.23</a:t>
+                        <a:t>Fleet Bound Premium: $207,789.56</a:t>
                       </a:r>
                     </a:p>
                   </a:txBody>
@@ -3727,7 +3727,7 @@
                         <a:rPr sz="900">
                           <a:latin typeface="Segoe UI"/>
                         </a:rPr>
-                        <a:t>Fleet Book %: 48.5%</a:t>
+                        <a:t>Fleet Book %: 45.9%</a:t>
                       </a:r>
                     </a:p>
                   </a:txBody>
@@ -3766,7 +3766,7 @@
                         <a:rPr sz="900">
                           <a:latin typeface="Segoe UI"/>
                         </a:rPr>
-                        <a:t>Non-Fleet Subs: 169  |  Binds: 16</a:t>
+                        <a:t>Non-Fleet Subs: 169  |  Binds: 17</a:t>
                       </a:r>
                     </a:p>
                   </a:txBody>
@@ -3803,7 +3803,7 @@
                         <a:rPr sz="900">
                           <a:latin typeface="Segoe UI"/>
                         </a:rPr>
-                        <a:t>Non-Fleet Bound Premium: $215,894.83</a:t>
+                        <a:t>Non-Fleet Bound Premium: $245,331.80</a:t>
                       </a:r>
                     </a:p>
                   </a:txBody>
@@ -3840,7 +3840,7 @@
                         <a:rPr sz="900">
                           <a:latin typeface="Segoe UI"/>
                         </a:rPr>
-                        <a:t>Non-Fleet Book %: 51.5%</a:t>
+                        <a:t>Non-Fleet Book %: 54.1%</a:t>
                       </a:r>
                     </a:p>
                   </a:txBody>
@@ -4707,7 +4707,7 @@
                           </a:solidFill>
                           <a:latin typeface="Segoe UI"/>
                         </a:rPr>
-                        <a:t>12.8%</a:t>
+                        <a:t>15.4%</a:t>
                       </a:r>
                     </a:p>
                   </a:txBody>
@@ -4983,7 +4983,7 @@
                           </a:solidFill>
                           <a:latin typeface="Segoe UI"/>
                         </a:rPr>
-                        <a:t>5</a:t>
+                        <a:t>6</a:t>
                       </a:r>
                     </a:p>
                   </a:txBody>
@@ -5262,7 +5262,7 @@
                           </a:solidFill>
                           <a:latin typeface="Segoe UI"/>
                         </a:rPr>
-                        <a:t>$72.6K</a:t>
+                        <a:t>$106.4K</a:t>
                       </a:r>
                     </a:p>
                   </a:txBody>

--- a/generated/Tier 1 Broker Scorecards/Usg Insurance Services Inc_Broker_Scorecard.pptx
+++ b/generated/Tier 1 Broker Scorecards/Usg Insurance Services Inc_Broker_Scorecard.pptx
@@ -3394,7 +3394,7 @@
                         <a:rPr sz="900">
                           <a:latin typeface="Segoe UI"/>
                         </a:rPr>
-                        <a:t>Tier 1  |  10.66% / 15.00%</a:t>
+                        <a:t>Tier 1  |  10.50% / 15.00%</a:t>
                       </a:r>
                     </a:p>
                   </a:txBody>
@@ -3653,7 +3653,7 @@
                         <a:rPr sz="900">
                           <a:latin typeface="Segoe UI"/>
                         </a:rPr>
-                        <a:t>Fleet Subs: 28  |  Binds: 4</a:t>
+                        <a:t>Fleet Subs: 29  |  Binds: 4</a:t>
                       </a:r>
                     </a:p>
                   </a:txBody>
@@ -3766,7 +3766,7 @@
                         <a:rPr sz="900">
                           <a:latin typeface="Segoe UI"/>
                         </a:rPr>
-                        <a:t>Non-Fleet Subs: 169  |  Binds: 17</a:t>
+                        <a:t>Non-Fleet Subs: 171  |  Binds: 17</a:t>
                       </a:r>
                     </a:p>
                   </a:txBody>
@@ -4428,7 +4428,7 @@
                           </a:solidFill>
                           <a:latin typeface="Segoe UI"/>
                         </a:rPr>
-                        <a:t>39</a:t>
+                        <a:t>42</a:t>
                       </a:r>
                     </a:p>
                   </a:txBody>
@@ -4581,7 +4581,7 @@
                         <a:rPr sz="800">
                           <a:latin typeface="Segoe UI"/>
                         </a:rPr>
-                        <a:t>14.5%</a:t>
+                        <a:t>12.9%</a:t>
                       </a:r>
                     </a:p>
                   </a:txBody>
@@ -4707,7 +4707,7 @@
                           </a:solidFill>
                           <a:latin typeface="Segoe UI"/>
                         </a:rPr>
-                        <a:t>15.4%</a:t>
+                        <a:t>14.3%</a:t>
                       </a:r>
                     </a:p>
                   </a:txBody>
@@ -4866,7 +4866,7 @@
                         <a:rPr sz="800">
                           <a:latin typeface="Segoe UI"/>
                         </a:rPr>
-                        <a:t>9</a:t>
+                        <a:t>8</a:t>
                       </a:r>
                     </a:p>
                   </a:txBody>

--- a/generated/Tier 1 Broker Scorecards/Usg Insurance Services Inc_Broker_Scorecard.pptx
+++ b/generated/Tier 1 Broker Scorecards/Usg Insurance Services Inc_Broker_Scorecard.pptx
@@ -3357,7 +3357,7 @@
                         <a:rPr sz="800">
                           <a:latin typeface="Segoe UI"/>
                         </a:rPr>
-                        <a:t>$1,155,193.59 / $1,162,926.98 / $453,121.36</a:t>
+                        <a:t>$1,155,193.59 / $1,181,947.63 / $472,142.01</a:t>
                       </a:r>
                     </a:p>
                   </a:txBody>
@@ -3394,7 +3394,7 @@
                         <a:rPr sz="900">
                           <a:latin typeface="Segoe UI"/>
                         </a:rPr>
-                        <a:t>Tier 1  |  10.50% / 15.00%</a:t>
+                        <a:t>Tier 1  |  10.40% / 15.00%</a:t>
                       </a:r>
                     </a:p>
                   </a:txBody>
@@ -3431,7 +3431,7 @@
                         <a:rPr sz="900">
                           <a:latin typeface="Segoe UI"/>
                         </a:rPr>
-                        <a:t>$1,617,271.03  (28.0% achieved)</a:t>
+                        <a:t>$1,617,271.03  (29.2% achieved)</a:t>
                       </a:r>
                     </a:p>
                   </a:txBody>
@@ -3690,7 +3690,7 @@
                         <a:rPr sz="900">
                           <a:latin typeface="Segoe UI"/>
                         </a:rPr>
-                        <a:t>Fleet Bound Premium: $207,789.56</a:t>
+                        <a:t>Fleet Bound Premium: $216,511.93</a:t>
                       </a:r>
                     </a:p>
                   </a:txBody>
@@ -3766,7 +3766,7 @@
                         <a:rPr sz="900">
                           <a:latin typeface="Segoe UI"/>
                         </a:rPr>
-                        <a:t>Non-Fleet Subs: 171  |  Binds: 17</a:t>
+                        <a:t>Non-Fleet Subs: 173  |  Binds: 17</a:t>
                       </a:r>
                     </a:p>
                   </a:txBody>
@@ -3803,7 +3803,7 @@
                         <a:rPr sz="900">
                           <a:latin typeface="Segoe UI"/>
                         </a:rPr>
-                        <a:t>Non-Fleet Bound Premium: $245,331.80</a:t>
+                        <a:t>Non-Fleet Bound Premium: $255,630.08</a:t>
                       </a:r>
                     </a:p>
                   </a:txBody>
@@ -4428,7 +4428,7 @@
                           </a:solidFill>
                           <a:latin typeface="Segoe UI"/>
                         </a:rPr>
-                        <a:t>42</a:t>
+                        <a:t>44</a:t>
                       </a:r>
                     </a:p>
                   </a:txBody>
@@ -4581,7 +4581,7 @@
                         <a:rPr sz="800">
                           <a:latin typeface="Segoe UI"/>
                         </a:rPr>
-                        <a:t>12.9%</a:t>
+                        <a:t>14.5%</a:t>
                       </a:r>
                     </a:p>
                   </a:txBody>
@@ -4707,7 +4707,7 @@
                           </a:solidFill>
                           <a:latin typeface="Segoe UI"/>
                         </a:rPr>
-                        <a:t>14.3%</a:t>
+                        <a:t>15.9%</a:t>
                       </a:r>
                     </a:p>
                   </a:txBody>
@@ -4866,7 +4866,7 @@
                         <a:rPr sz="800">
                           <a:latin typeface="Segoe UI"/>
                         </a:rPr>
-                        <a:t>8</a:t>
+                        <a:t>9</a:t>
                       </a:r>
                     </a:p>
                   </a:txBody>
@@ -4983,7 +4983,7 @@
                           </a:solidFill>
                           <a:latin typeface="Segoe UI"/>
                         </a:rPr>
-                        <a:t>6</a:t>
+                        <a:t>7</a:t>
                       </a:r>
                     </a:p>
                   </a:txBody>
@@ -5262,7 +5262,7 @@
                           </a:solidFill>
                           <a:latin typeface="Segoe UI"/>
                         </a:rPr>
-                        <a:t>$106.4K</a:t>
+                        <a:t>$125.5K</a:t>
                       </a:r>
                     </a:p>
                   </a:txBody>

--- a/generated/Tier 1 Broker Scorecards/Usg Insurance Services Inc_Broker_Scorecard.pptx
+++ b/generated/Tier 1 Broker Scorecards/Usg Insurance Services Inc_Broker_Scorecard.pptx
@@ -3394,7 +3394,7 @@
                         <a:rPr sz="900">
                           <a:latin typeface="Segoe UI"/>
                         </a:rPr>
-                        <a:t>Tier 1  |  10.40% / 15.00%</a:t>
+                        <a:t>Tier 1  |  9.85% / 15.00%</a:t>
                       </a:r>
                     </a:p>
                   </a:txBody>
@@ -3690,7 +3690,7 @@
                         <a:rPr sz="900">
                           <a:latin typeface="Segoe UI"/>
                         </a:rPr>
-                        <a:t>Fleet Bound Premium: $216,511.93</a:t>
+                        <a:t>Fleet Bound Premium: $222,343.61</a:t>
                       </a:r>
                     </a:p>
                   </a:txBody>
@@ -3727,7 +3727,7 @@
                         <a:rPr sz="900">
                           <a:latin typeface="Segoe UI"/>
                         </a:rPr>
-                        <a:t>Fleet Book %: 45.9%</a:t>
+                        <a:t>Fleet Book %: 47.1%</a:t>
                       </a:r>
                     </a:p>
                   </a:txBody>
@@ -3766,7 +3766,7 @@
                         <a:rPr sz="900">
                           <a:latin typeface="Segoe UI"/>
                         </a:rPr>
-                        <a:t>Non-Fleet Subs: 173  |  Binds: 17</a:t>
+                        <a:t>Non-Fleet Subs: 174  |  Binds: 16</a:t>
                       </a:r>
                     </a:p>
                   </a:txBody>
@@ -3803,7 +3803,7 @@
                         <a:rPr sz="900">
                           <a:latin typeface="Segoe UI"/>
                         </a:rPr>
-                        <a:t>Non-Fleet Bound Premium: $255,630.08</a:t>
+                        <a:t>Non-Fleet Bound Premium: $249,798.40</a:t>
                       </a:r>
                     </a:p>
                   </a:txBody>
@@ -3840,7 +3840,7 @@
                         <a:rPr sz="900">
                           <a:latin typeface="Segoe UI"/>
                         </a:rPr>
-                        <a:t>Non-Fleet Book %: 54.1%</a:t>
+                        <a:t>Non-Fleet Book %: 52.9%</a:t>
                       </a:r>
                     </a:p>
                   </a:txBody>
@@ -4428,7 +4428,7 @@
                           </a:solidFill>
                           <a:latin typeface="Segoe UI"/>
                         </a:rPr>
-                        <a:t>44</a:t>
+                        <a:t>46</a:t>
                       </a:r>
                     </a:p>
                   </a:txBody>
@@ -4581,7 +4581,7 @@
                         <a:rPr sz="800">
                           <a:latin typeface="Segoe UI"/>
                         </a:rPr>
-                        <a:t>14.5%</a:t>
+                        <a:t>12.9%</a:t>
                       </a:r>
                     </a:p>
                   </a:txBody>
@@ -4707,7 +4707,7 @@
                           </a:solidFill>
                           <a:latin typeface="Segoe UI"/>
                         </a:rPr>
-                        <a:t>15.9%</a:t>
+                        <a:t>15.2%</a:t>
                       </a:r>
                     </a:p>
                   </a:txBody>
@@ -4866,7 +4866,7 @@
                         <a:rPr sz="800">
                           <a:latin typeface="Segoe UI"/>
                         </a:rPr>
-                        <a:t>9</a:t>
+                        <a:t>8</a:t>
                       </a:r>
                     </a:p>
                   </a:txBody>

--- a/generated/Tier 1 Broker Scorecards/Usg Insurance Services Inc_Broker_Scorecard.pptx
+++ b/generated/Tier 1 Broker Scorecards/Usg Insurance Services Inc_Broker_Scorecard.pptx
@@ -3357,7 +3357,7 @@
                         <a:rPr sz="800">
                           <a:latin typeface="Segoe UI"/>
                         </a:rPr>
-                        <a:t>$1,155,193.59 / $1,181,947.63 / $472,142.01</a:t>
+                        <a:t>$1,155,193.59 / $983,280.04 / $472,142.01</a:t>
                       </a:r>
                     </a:p>
                   </a:txBody>
